--- a/.lessons/36 Packages Shopping Cart/6 Update cart product quantity/1.pptx
+++ b/.lessons/36 Packages Shopping Cart/6 Update cart product quantity/1.pptx
@@ -7,7 +7,10 @@
   <p:sldIdLst>
     <p:sldId id="402" r:id="rId2"/>
     <p:sldId id="403" r:id="rId3"/>
-    <p:sldId id="400" r:id="rId4"/>
+    <p:sldId id="404" r:id="rId4"/>
+    <p:sldId id="405" r:id="rId5"/>
+    <p:sldId id="406" r:id="rId6"/>
+    <p:sldId id="400" r:id="rId7"/>
   </p:sldIdLst>
   <p:sldSz cx="12192000" cy="6858000"/>
   <p:notesSz cx="6858000" cy="9144000"/>
@@ -261,7 +264,7 @@
           <a:p>
             <a:fld id="{3E102D2E-813C-461C-9963-687A650C48C0}" type="datetimeFigureOut">
               <a:rPr lang="en-US" smtClean="0"/>
-              <a:t>5/23/2025</a:t>
+              <a:t>6/20/2025</a:t>
             </a:fld>
             <a:endParaRPr lang="en-US"/>
           </a:p>
@@ -459,7 +462,7 @@
           <a:p>
             <a:fld id="{3E102D2E-813C-461C-9963-687A650C48C0}" type="datetimeFigureOut">
               <a:rPr lang="en-US" smtClean="0"/>
-              <a:t>5/23/2025</a:t>
+              <a:t>6/20/2025</a:t>
             </a:fld>
             <a:endParaRPr lang="en-US"/>
           </a:p>
@@ -667,7 +670,7 @@
           <a:p>
             <a:fld id="{3E102D2E-813C-461C-9963-687A650C48C0}" type="datetimeFigureOut">
               <a:rPr lang="en-US" smtClean="0"/>
-              <a:t>5/23/2025</a:t>
+              <a:t>6/20/2025</a:t>
             </a:fld>
             <a:endParaRPr lang="en-US"/>
           </a:p>
@@ -865,7 +868,7 @@
           <a:p>
             <a:fld id="{3E102D2E-813C-461C-9963-687A650C48C0}" type="datetimeFigureOut">
               <a:rPr lang="en-US" smtClean="0"/>
-              <a:t>5/23/2025</a:t>
+              <a:t>6/20/2025</a:t>
             </a:fld>
             <a:endParaRPr lang="en-US"/>
           </a:p>
@@ -1140,7 +1143,7 @@
           <a:p>
             <a:fld id="{3E102D2E-813C-461C-9963-687A650C48C0}" type="datetimeFigureOut">
               <a:rPr lang="en-US" smtClean="0"/>
-              <a:t>5/23/2025</a:t>
+              <a:t>6/20/2025</a:t>
             </a:fld>
             <a:endParaRPr lang="en-US"/>
           </a:p>
@@ -1405,7 +1408,7 @@
           <a:p>
             <a:fld id="{3E102D2E-813C-461C-9963-687A650C48C0}" type="datetimeFigureOut">
               <a:rPr lang="en-US" smtClean="0"/>
-              <a:t>5/23/2025</a:t>
+              <a:t>6/20/2025</a:t>
             </a:fld>
             <a:endParaRPr lang="en-US"/>
           </a:p>
@@ -1817,7 +1820,7 @@
           <a:p>
             <a:fld id="{3E102D2E-813C-461C-9963-687A650C48C0}" type="datetimeFigureOut">
               <a:rPr lang="en-US" smtClean="0"/>
-              <a:t>5/23/2025</a:t>
+              <a:t>6/20/2025</a:t>
             </a:fld>
             <a:endParaRPr lang="en-US"/>
           </a:p>
@@ -1958,7 +1961,7 @@
           <a:p>
             <a:fld id="{3E102D2E-813C-461C-9963-687A650C48C0}" type="datetimeFigureOut">
               <a:rPr lang="en-US" smtClean="0"/>
-              <a:t>5/23/2025</a:t>
+              <a:t>6/20/2025</a:t>
             </a:fld>
             <a:endParaRPr lang="en-US"/>
           </a:p>
@@ -2071,7 +2074,7 @@
           <a:p>
             <a:fld id="{3E102D2E-813C-461C-9963-687A650C48C0}" type="datetimeFigureOut">
               <a:rPr lang="en-US" smtClean="0"/>
-              <a:t>5/23/2025</a:t>
+              <a:t>6/20/2025</a:t>
             </a:fld>
             <a:endParaRPr lang="en-US"/>
           </a:p>
@@ -2382,7 +2385,7 @@
           <a:p>
             <a:fld id="{3E102D2E-813C-461C-9963-687A650C48C0}" type="datetimeFigureOut">
               <a:rPr lang="en-US" smtClean="0"/>
-              <a:t>5/23/2025</a:t>
+              <a:t>6/20/2025</a:t>
             </a:fld>
             <a:endParaRPr lang="en-US"/>
           </a:p>
@@ -2670,7 +2673,7 @@
           <a:p>
             <a:fld id="{3E102D2E-813C-461C-9963-687A650C48C0}" type="datetimeFigureOut">
               <a:rPr lang="en-US" smtClean="0"/>
-              <a:t>5/23/2025</a:t>
+              <a:t>6/20/2025</a:t>
             </a:fld>
             <a:endParaRPr lang="en-US"/>
           </a:p>
@@ -2911,7 +2914,7 @@
           <a:p>
             <a:fld id="{3E102D2E-813C-461C-9963-687A650C48C0}" type="datetimeFigureOut">
               <a:rPr lang="en-US" smtClean="0"/>
-              <a:t>5/23/2025</a:t>
+              <a:t>6/20/2025</a:t>
             </a:fld>
             <a:endParaRPr lang="en-US"/>
           </a:p>
@@ -3348,8 +3351,8 @@
         </p:nvSpPr>
         <p:spPr>
           <a:xfrm>
-            <a:off x="217714" y="255046"/>
-            <a:ext cx="11756571" cy="355354"/>
+            <a:off x="217713" y="87095"/>
+            <a:ext cx="11756571" cy="4767139"/>
           </a:xfrm>
           <a:prstGeom prst="rect">
             <a:avLst/>
@@ -3369,21 +3372,395 @@
               <a:buNone/>
             </a:pPr>
             <a:r>
-              <a:rPr kumimoji="0" lang="en-US" altLang="en-US" sz="1300" b="0" i="0" u="none" strike="noStrike" cap="none" normalizeH="0" baseline="0">
-                <a:ln>
-                  <a:noFill/>
-                </a:ln>
-                <a:solidFill>
-                  <a:schemeClr val="tx1"/>
-                </a:solidFill>
-                <a:effectLst/>
+              <a:rPr lang="az-Latn-AZ" altLang="en-US" sz="1200">
                 <a:latin typeface="Arial" panose="020B0604020202020204" pitchFamily="34" charset="0"/>
               </a:rPr>
-              <a:t>.</a:t>
-            </a:r>
-          </a:p>
-        </p:txBody>
-      </p:sp>
+              <a:t>İdni məhsulu necə </a:t>
+            </a:r>
+            <a:r>
+              <a:rPr lang="az-Latn-AZ" altLang="en-US" sz="1200" b="1">
+                <a:latin typeface="Arial" panose="020B0604020202020204" pitchFamily="34" charset="0"/>
+              </a:rPr>
+              <a:t>UPDATE</a:t>
+            </a:r>
+            <a:r>
+              <a:rPr lang="az-Latn-AZ" altLang="en-US" sz="1200">
+                <a:latin typeface="Arial" panose="020B0604020202020204" pitchFamily="34" charset="0"/>
+              </a:rPr>
+              <a:t> edə bilərik ona baxaq. Bunun üçün paketdə aşağıdakı kimi bir metod var. </a:t>
+            </a:r>
+          </a:p>
+          <a:p>
+            <a:pPr>
+              <a:lnSpc>
+                <a:spcPct val="150000"/>
+              </a:lnSpc>
+              <a:buNone/>
+            </a:pPr>
+            <a:endParaRPr lang="az-Latn-AZ" altLang="en-US" sz="1200">
+              <a:latin typeface="Arial" panose="020B0604020202020204" pitchFamily="34" charset="0"/>
+            </a:endParaRPr>
+          </a:p>
+          <a:p>
+            <a:pPr>
+              <a:lnSpc>
+                <a:spcPct val="150000"/>
+              </a:lnSpc>
+              <a:buNone/>
+            </a:pPr>
+            <a:endParaRPr lang="az-Latn-AZ" altLang="en-US" sz="1200">
+              <a:latin typeface="Arial" panose="020B0604020202020204" pitchFamily="34" charset="0"/>
+            </a:endParaRPr>
+          </a:p>
+          <a:p>
+            <a:pPr>
+              <a:lnSpc>
+                <a:spcPct val="150000"/>
+              </a:lnSpc>
+              <a:buNone/>
+            </a:pPr>
+            <a:endParaRPr lang="az-Latn-AZ" altLang="en-US" sz="1200">
+              <a:latin typeface="Arial" panose="020B0604020202020204" pitchFamily="34" charset="0"/>
+            </a:endParaRPr>
+          </a:p>
+          <a:p>
+            <a:pPr>
+              <a:lnSpc>
+                <a:spcPct val="150000"/>
+              </a:lnSpc>
+              <a:buNone/>
+            </a:pPr>
+            <a:endParaRPr lang="az-Latn-AZ" altLang="en-US" sz="1200">
+              <a:latin typeface="Arial" panose="020B0604020202020204" pitchFamily="34" charset="0"/>
+            </a:endParaRPr>
+          </a:p>
+          <a:p>
+            <a:pPr>
+              <a:lnSpc>
+                <a:spcPct val="150000"/>
+              </a:lnSpc>
+              <a:buNone/>
+            </a:pPr>
+            <a:endParaRPr lang="az-Latn-AZ" altLang="en-US" sz="1200">
+              <a:latin typeface="Arial" panose="020B0604020202020204" pitchFamily="34" charset="0"/>
+            </a:endParaRPr>
+          </a:p>
+          <a:p>
+            <a:pPr>
+              <a:lnSpc>
+                <a:spcPct val="150000"/>
+              </a:lnSpc>
+              <a:buNone/>
+            </a:pPr>
+            <a:endParaRPr kumimoji="0" lang="az-Latn-AZ" altLang="en-US" sz="1200" b="0" i="0" u="none" strike="noStrike" cap="none" normalizeH="0" baseline="0">
+              <a:ln>
+                <a:noFill/>
+              </a:ln>
+              <a:solidFill>
+                <a:schemeClr val="tx1"/>
+              </a:solidFill>
+              <a:effectLst/>
+              <a:latin typeface="Arial" panose="020B0604020202020204" pitchFamily="34" charset="0"/>
+            </a:endParaRPr>
+          </a:p>
+          <a:p>
+            <a:pPr>
+              <a:lnSpc>
+                <a:spcPct val="150000"/>
+              </a:lnSpc>
+              <a:buNone/>
+            </a:pPr>
+            <a:endParaRPr lang="az-Latn-AZ" altLang="en-US" sz="1200">
+              <a:latin typeface="Arial" panose="020B0604020202020204" pitchFamily="34" charset="0"/>
+            </a:endParaRPr>
+          </a:p>
+          <a:p>
+            <a:pPr>
+              <a:lnSpc>
+                <a:spcPct val="150000"/>
+              </a:lnSpc>
+              <a:buNone/>
+            </a:pPr>
+            <a:endParaRPr kumimoji="0" lang="az-Latn-AZ" altLang="en-US" sz="1200" b="0" i="0" u="none" strike="noStrike" cap="none" normalizeH="0" baseline="0">
+              <a:ln>
+                <a:noFill/>
+              </a:ln>
+              <a:solidFill>
+                <a:schemeClr val="tx1"/>
+              </a:solidFill>
+              <a:effectLst/>
+              <a:latin typeface="Arial" panose="020B0604020202020204" pitchFamily="34" charset="0"/>
+            </a:endParaRPr>
+          </a:p>
+          <a:p>
+            <a:pPr>
+              <a:lnSpc>
+                <a:spcPct val="150000"/>
+              </a:lnSpc>
+              <a:buNone/>
+            </a:pPr>
+            <a:endParaRPr lang="az-Latn-AZ" altLang="en-US" sz="1200">
+              <a:latin typeface="Arial" panose="020B0604020202020204" pitchFamily="34" charset="0"/>
+            </a:endParaRPr>
+          </a:p>
+          <a:p>
+            <a:pPr>
+              <a:lnSpc>
+                <a:spcPct val="150000"/>
+              </a:lnSpc>
+              <a:buNone/>
+            </a:pPr>
+            <a:endParaRPr kumimoji="0" lang="az-Latn-AZ" altLang="en-US" sz="1200" b="0" i="0" u="none" strike="noStrike" cap="none" normalizeH="0" baseline="0">
+              <a:ln>
+                <a:noFill/>
+              </a:ln>
+              <a:solidFill>
+                <a:schemeClr val="tx1"/>
+              </a:solidFill>
+              <a:effectLst/>
+              <a:latin typeface="Arial" panose="020B0604020202020204" pitchFamily="34" charset="0"/>
+            </a:endParaRPr>
+          </a:p>
+          <a:p>
+            <a:pPr>
+              <a:lnSpc>
+                <a:spcPct val="150000"/>
+              </a:lnSpc>
+              <a:buNone/>
+            </a:pPr>
+            <a:endParaRPr lang="az-Latn-AZ" altLang="en-US" sz="1200">
+              <a:latin typeface="Arial" panose="020B0604020202020204" pitchFamily="34" charset="0"/>
+            </a:endParaRPr>
+          </a:p>
+          <a:p>
+            <a:pPr>
+              <a:lnSpc>
+                <a:spcPct val="150000"/>
+              </a:lnSpc>
+              <a:buNone/>
+            </a:pPr>
+            <a:endParaRPr kumimoji="0" lang="az-Latn-AZ" altLang="en-US" sz="1200" b="0" i="0" u="none" strike="noStrike" cap="none" normalizeH="0" baseline="0">
+              <a:ln>
+                <a:noFill/>
+              </a:ln>
+              <a:solidFill>
+                <a:schemeClr val="tx1"/>
+              </a:solidFill>
+              <a:effectLst/>
+              <a:latin typeface="Arial" panose="020B0604020202020204" pitchFamily="34" charset="0"/>
+            </a:endParaRPr>
+          </a:p>
+          <a:p>
+            <a:pPr>
+              <a:lnSpc>
+                <a:spcPct val="150000"/>
+              </a:lnSpc>
+              <a:buNone/>
+            </a:pPr>
+            <a:endParaRPr lang="az-Latn-AZ" altLang="en-US" sz="1200">
+              <a:latin typeface="Arial" panose="020B0604020202020204" pitchFamily="34" charset="0"/>
+            </a:endParaRPr>
+          </a:p>
+          <a:p>
+            <a:pPr>
+              <a:lnSpc>
+                <a:spcPct val="150000"/>
+              </a:lnSpc>
+              <a:buNone/>
+            </a:pPr>
+            <a:endParaRPr kumimoji="0" lang="az-Latn-AZ" altLang="en-US" sz="1200" b="0" i="0" u="none" strike="noStrike" cap="none" normalizeH="0" baseline="0">
+              <a:ln>
+                <a:noFill/>
+              </a:ln>
+              <a:solidFill>
+                <a:schemeClr val="tx1"/>
+              </a:solidFill>
+              <a:effectLst/>
+              <a:latin typeface="Arial" panose="020B0604020202020204" pitchFamily="34" charset="0"/>
+            </a:endParaRPr>
+          </a:p>
+          <a:p>
+            <a:pPr>
+              <a:lnSpc>
+                <a:spcPct val="150000"/>
+              </a:lnSpc>
+              <a:buNone/>
+            </a:pPr>
+            <a:endParaRPr kumimoji="0" lang="az-Latn-AZ" altLang="en-US" sz="1200" b="0" i="0" u="none" strike="noStrike" cap="none" normalizeH="0" baseline="0">
+              <a:ln>
+                <a:noFill/>
+              </a:ln>
+              <a:solidFill>
+                <a:schemeClr val="tx1"/>
+              </a:solidFill>
+              <a:effectLst/>
+              <a:latin typeface="Arial" panose="020B0604020202020204" pitchFamily="34" charset="0"/>
+            </a:endParaRPr>
+          </a:p>
+          <a:p>
+            <a:pPr>
+              <a:lnSpc>
+                <a:spcPct val="150000"/>
+              </a:lnSpc>
+              <a:buNone/>
+            </a:pPr>
+            <a:r>
+              <a:rPr lang="az-Latn-AZ" altLang="en-US" sz="1200">
+                <a:latin typeface="Arial" panose="020B0604020202020204" pitchFamily="34" charset="0"/>
+              </a:rPr>
+              <a:t>Nümunədə </a:t>
+            </a:r>
+            <a:r>
+              <a:rPr lang="en-US" altLang="en-US" sz="1200" b="1">
+                <a:latin typeface="Arial" panose="020B0604020202020204" pitchFamily="34" charset="0"/>
+              </a:rPr>
+              <a:t>$rowId </a:t>
+            </a:r>
+            <a:r>
+              <a:rPr lang="en-US" altLang="en-US" sz="1200">
+                <a:latin typeface="Arial" panose="020B0604020202020204" pitchFamily="34" charset="0"/>
+              </a:rPr>
+              <a:t>de</a:t>
+            </a:r>
+            <a:r>
+              <a:rPr lang="az-Latn-AZ" altLang="en-US" sz="1200">
+                <a:latin typeface="Arial" panose="020B0604020202020204" pitchFamily="34" charset="0"/>
+              </a:rPr>
+              <a:t>yilən bir arqument var </a:t>
+            </a:r>
+            <a:r>
+              <a:rPr lang="az-Latn-AZ" altLang="en-US" sz="1200" b="1">
+                <a:latin typeface="Arial" panose="020B0604020202020204" pitchFamily="34" charset="0"/>
+              </a:rPr>
+              <a:t>1ci</a:t>
+            </a:r>
+            <a:r>
+              <a:rPr lang="az-Latn-AZ" altLang="en-US" sz="1200">
+                <a:latin typeface="Arial" panose="020B0604020202020204" pitchFamily="34" charset="0"/>
+              </a:rPr>
+              <a:t> parametr yerində... Bu </a:t>
+            </a:r>
+            <a:r>
+              <a:rPr lang="az-Latn-AZ" altLang="en-US" sz="1200" b="1">
+                <a:latin typeface="Arial" panose="020B0604020202020204" pitchFamily="34" charset="0"/>
+              </a:rPr>
+              <a:t>Cart</a:t>
+            </a:r>
+            <a:r>
+              <a:rPr lang="az-Latn-AZ" altLang="en-US" sz="1200">
+                <a:latin typeface="Arial" panose="020B0604020202020204" pitchFamily="34" charset="0"/>
+              </a:rPr>
+              <a:t> klasının </a:t>
+            </a:r>
+            <a:r>
+              <a:rPr lang="az-Latn-AZ" altLang="en-US" sz="1200" b="1">
+                <a:latin typeface="Arial" panose="020B0604020202020204" pitchFamily="34" charset="0"/>
+              </a:rPr>
+              <a:t>avtomatik</a:t>
+            </a:r>
+            <a:r>
+              <a:rPr lang="az-Latn-AZ" altLang="en-US" sz="1200">
+                <a:latin typeface="Arial" panose="020B0604020202020204" pitchFamily="34" charset="0"/>
+              </a:rPr>
+              <a:t> yaratdığı bir </a:t>
+            </a:r>
+            <a:r>
+              <a:rPr lang="az-Latn-AZ" altLang="en-US" sz="1200" b="1">
+                <a:latin typeface="Arial" panose="020B0604020202020204" pitchFamily="34" charset="0"/>
+              </a:rPr>
+              <a:t>variable</a:t>
+            </a:r>
+            <a:r>
+              <a:rPr lang="az-Latn-AZ" altLang="en-US" sz="1200">
+                <a:latin typeface="Arial" panose="020B0604020202020204" pitchFamily="34" charset="0"/>
+              </a:rPr>
+              <a:t> -dır. </a:t>
+            </a:r>
+            <a:r>
+              <a:rPr lang="az-Latn-AZ" altLang="en-US" sz="1200" b="1">
+                <a:latin typeface="Arial" panose="020B0604020202020204" pitchFamily="34" charset="0"/>
+              </a:rPr>
+              <a:t>Sessionlarda</a:t>
+            </a:r>
+            <a:r>
+              <a:rPr lang="az-Latn-AZ" altLang="en-US" sz="1200">
+                <a:latin typeface="Arial" panose="020B0604020202020204" pitchFamily="34" charset="0"/>
+              </a:rPr>
+              <a:t> görmək mümkündür bu variable -ı.</a:t>
+            </a:r>
+            <a:endParaRPr kumimoji="0" lang="en-US" altLang="en-US" sz="1200" b="0" i="0" u="none" strike="noStrike" cap="none" normalizeH="0" baseline="0">
+              <a:ln>
+                <a:noFill/>
+              </a:ln>
+              <a:solidFill>
+                <a:schemeClr val="tx1"/>
+              </a:solidFill>
+              <a:effectLst/>
+              <a:latin typeface="Arial" panose="020B0604020202020204" pitchFamily="34" charset="0"/>
+            </a:endParaRPr>
+          </a:p>
+        </p:txBody>
+      </p:sp>
+      <p:pic>
+        <p:nvPicPr>
+          <p:cNvPr id="4" name="Picture 3">
+            <a:extLst>
+              <a:ext uri="{FF2B5EF4-FFF2-40B4-BE49-F238E27FC236}">
+                <a16:creationId xmlns:a16="http://schemas.microsoft.com/office/drawing/2014/main" id="{C9C5FF2C-077C-FD9A-726D-8274473C0425}"/>
+              </a:ext>
+            </a:extLst>
+          </p:cNvPr>
+          <p:cNvPicPr>
+            <a:picLocks noChangeAspect="1"/>
+          </p:cNvPicPr>
+          <p:nvPr/>
+        </p:nvPicPr>
+        <p:blipFill>
+          <a:blip r:embed="rId2"/>
+          <a:stretch>
+            <a:fillRect/>
+          </a:stretch>
+        </p:blipFill>
+        <p:spPr>
+          <a:xfrm>
+            <a:off x="0" y="522322"/>
+            <a:ext cx="12192000" cy="3695114"/>
+          </a:xfrm>
+          <a:prstGeom prst="rect">
+            <a:avLst/>
+          </a:prstGeom>
+        </p:spPr>
+      </p:pic>
+      <p:pic>
+        <p:nvPicPr>
+          <p:cNvPr id="6" name="Picture 5">
+            <a:extLst>
+              <a:ext uri="{FF2B5EF4-FFF2-40B4-BE49-F238E27FC236}">
+                <a16:creationId xmlns:a16="http://schemas.microsoft.com/office/drawing/2014/main" id="{551D5E0E-4E93-71D5-A734-3ACF6EB22A73}"/>
+              </a:ext>
+            </a:extLst>
+          </p:cNvPr>
+          <p:cNvPicPr>
+            <a:picLocks noChangeAspect="1"/>
+          </p:cNvPicPr>
+          <p:nvPr/>
+        </p:nvPicPr>
+        <p:blipFill>
+          <a:blip r:embed="rId3"/>
+          <a:stretch>
+            <a:fillRect/>
+          </a:stretch>
+        </p:blipFill>
+        <p:spPr>
+          <a:xfrm>
+            <a:off x="298052" y="4967785"/>
+            <a:ext cx="9592397" cy="1890215"/>
+          </a:xfrm>
+          <a:prstGeom prst="rect">
+            <a:avLst/>
+          </a:prstGeom>
+        </p:spPr>
+      </p:pic>
     </p:spTree>
     <p:extLst>
       <p:ext uri="{BB962C8B-B14F-4D97-AF65-F5344CB8AC3E}">
@@ -3434,8 +3811,8 @@
         </p:nvSpPr>
         <p:spPr>
           <a:xfrm>
-            <a:off x="217714" y="255046"/>
-            <a:ext cx="11756571" cy="355354"/>
+            <a:off x="217714" y="124418"/>
+            <a:ext cx="11756571" cy="1445973"/>
           </a:xfrm>
           <a:prstGeom prst="rect">
             <a:avLst/>
@@ -3455,21 +3832,238 @@
               <a:buNone/>
             </a:pPr>
             <a:r>
-              <a:rPr kumimoji="0" lang="en-US" altLang="en-US" sz="1300" b="0" i="0" u="none" strike="noStrike" cap="none" normalizeH="0" baseline="0">
+              <a:rPr lang="az-Latn-AZ" altLang="en-US" sz="1100">
+                <a:latin typeface="Arial" panose="020B0604020202020204" pitchFamily="34" charset="0"/>
+              </a:rPr>
+              <a:t>Həmin </a:t>
+            </a:r>
+            <a:r>
+              <a:rPr lang="en-US" altLang="en-US" sz="1100" b="1">
+                <a:solidFill>
+                  <a:srgbClr val="FF0000"/>
+                </a:solidFill>
+                <a:latin typeface="Arial" panose="020B0604020202020204" pitchFamily="34" charset="0"/>
+              </a:rPr>
+              <a:t>$rowId </a:t>
+            </a:r>
+            <a:r>
+              <a:rPr lang="en-US" altLang="en-US" sz="1100">
+                <a:latin typeface="Arial" panose="020B0604020202020204" pitchFamily="34" charset="0"/>
+              </a:rPr>
+              <a:t>variable -</a:t>
+            </a:r>
+            <a:r>
+              <a:rPr lang="az-Latn-AZ" altLang="en-US" sz="1100">
+                <a:latin typeface="Arial" panose="020B0604020202020204" pitchFamily="34" charset="0"/>
+              </a:rPr>
+              <a:t>ından istifadə edərək məhsul kolleksiyasını əldə edirik. Həmin kolleksiyanın içindən </a:t>
+            </a:r>
+            <a:r>
+              <a:rPr lang="en-US" altLang="en-US" sz="1100" b="1">
+                <a:latin typeface="Arial" panose="020B0604020202020204" pitchFamily="34" charset="0"/>
+              </a:rPr>
+              <a:t>$product-&gt;qty </a:t>
+            </a:r>
+            <a:r>
+              <a:rPr lang="az-Latn-AZ" altLang="en-US" sz="1100">
+                <a:latin typeface="Arial" panose="020B0604020202020204" pitchFamily="34" charset="0"/>
+              </a:rPr>
+              <a:t>yazaraq əlavə edilən məhsulun </a:t>
+            </a:r>
+            <a:r>
+              <a:rPr lang="az-Latn-AZ" altLang="en-US" sz="1100" b="1">
+                <a:latin typeface="Arial" panose="020B0604020202020204" pitchFamily="34" charset="0"/>
+              </a:rPr>
+              <a:t>miqdarını</a:t>
+            </a:r>
+            <a:r>
+              <a:rPr lang="az-Latn-AZ" altLang="en-US" sz="1100">
+                <a:latin typeface="Arial" panose="020B0604020202020204" pitchFamily="34" charset="0"/>
+              </a:rPr>
+              <a:t> çağırırıq və hər düymə kliklənəndə bir-bir həmin məhsulun miqdarını </a:t>
+            </a:r>
+            <a:r>
+              <a:rPr lang="az-Latn-AZ" altLang="en-US" sz="1100" b="1">
+                <a:latin typeface="Arial" panose="020B0604020202020204" pitchFamily="34" charset="0"/>
+              </a:rPr>
+              <a:t>artırırıq</a:t>
+            </a:r>
+            <a:r>
+              <a:rPr lang="az-Latn-AZ" altLang="en-US" sz="1100">
+                <a:latin typeface="Arial" panose="020B0604020202020204" pitchFamily="34" charset="0"/>
+              </a:rPr>
+              <a:t>.</a:t>
+            </a:r>
+          </a:p>
+          <a:p>
+            <a:pPr>
+              <a:lnSpc>
+                <a:spcPct val="150000"/>
+              </a:lnSpc>
+              <a:buNone/>
+            </a:pPr>
+            <a:endParaRPr kumimoji="0" lang="az-Latn-AZ" altLang="en-US" sz="500" b="0" i="0" u="none" strike="noStrike" cap="none" normalizeH="0" baseline="0">
+              <a:ln>
+                <a:noFill/>
+              </a:ln>
+              <a:solidFill>
+                <a:schemeClr val="tx1"/>
+              </a:solidFill>
+              <a:effectLst/>
+              <a:latin typeface="Arial" panose="020B0604020202020204" pitchFamily="34" charset="0"/>
+            </a:endParaRPr>
+          </a:p>
+          <a:p>
+            <a:pPr>
+              <a:lnSpc>
+                <a:spcPct val="150000"/>
+              </a:lnSpc>
+              <a:buNone/>
+            </a:pPr>
+            <a:r>
+              <a:rPr lang="az-Latn-AZ" altLang="en-US" sz="1100">
+                <a:latin typeface="Arial" panose="020B0604020202020204" pitchFamily="34" charset="0"/>
+              </a:rPr>
+              <a:t>Sonrada ekrana, `</a:t>
+            </a:r>
+            <a:r>
+              <a:rPr lang="az-Latn-AZ" altLang="en-US" sz="1100" b="1">
+                <a:latin typeface="Arial" panose="020B0604020202020204" pitchFamily="34" charset="0"/>
+              </a:rPr>
+              <a:t>məhsul uğurla əlavə edildi</a:t>
+            </a:r>
+            <a:r>
+              <a:rPr lang="az-Latn-AZ" altLang="en-US" sz="1100">
+                <a:latin typeface="Arial" panose="020B0604020202020204" pitchFamily="34" charset="0"/>
+              </a:rPr>
+              <a:t>` mesajını yazdırırıq.  </a:t>
+            </a:r>
+            <a:r>
+              <a:rPr lang="az-Latn-AZ" altLang="en-US" sz="1100" b="1">
+                <a:latin typeface="Arial" panose="020B0604020202020204" pitchFamily="34" charset="0"/>
+              </a:rPr>
+              <a:t>NOT</a:t>
+            </a:r>
+            <a:r>
+              <a:rPr lang="az-Latn-AZ" altLang="en-US" sz="1100">
+                <a:latin typeface="Arial" panose="020B0604020202020204" pitchFamily="34" charset="0"/>
+              </a:rPr>
+              <a:t>: </a:t>
+            </a:r>
+            <a:r>
+              <a:rPr lang="az-Latn-AZ" altLang="en-US" sz="1100" b="1">
+                <a:latin typeface="Arial" panose="020B0604020202020204" pitchFamily="34" charset="0"/>
+              </a:rPr>
+              <a:t>increment</a:t>
+            </a:r>
+            <a:r>
+              <a:rPr lang="az-Latn-AZ" altLang="en-US" sz="1100">
+                <a:latin typeface="Arial" panose="020B0604020202020204" pitchFamily="34" charset="0"/>
+              </a:rPr>
+              <a:t> ilə </a:t>
+            </a:r>
+            <a:r>
+              <a:rPr lang="az-Latn-AZ" altLang="en-US" sz="1100" b="1">
+                <a:latin typeface="Arial" panose="020B0604020202020204" pitchFamily="34" charset="0"/>
+              </a:rPr>
+              <a:t>decrement</a:t>
+            </a:r>
+            <a:r>
+              <a:rPr lang="az-Latn-AZ" altLang="en-US" sz="1100">
+                <a:latin typeface="Arial" panose="020B0604020202020204" pitchFamily="34" charset="0"/>
+              </a:rPr>
+              <a:t> yeri şəkildə səhf göstərilib.  </a:t>
+            </a:r>
+          </a:p>
+          <a:p>
+            <a:pPr>
+              <a:lnSpc>
+                <a:spcPct val="150000"/>
+              </a:lnSpc>
+              <a:buNone/>
+            </a:pPr>
+            <a:endParaRPr lang="az-Latn-AZ" altLang="en-US" sz="1100">
+              <a:latin typeface="Arial" panose="020B0604020202020204" pitchFamily="34" charset="0"/>
+            </a:endParaRPr>
+          </a:p>
+          <a:p>
+            <a:pPr>
+              <a:lnSpc>
+                <a:spcPct val="150000"/>
+              </a:lnSpc>
+              <a:buNone/>
+            </a:pPr>
+            <a:r>
+              <a:rPr kumimoji="0" lang="az-Latn-AZ" altLang="en-US" sz="1100" b="1" i="0" u="none" strike="noStrike" cap="none" normalizeH="0" baseline="0">
                 <a:ln>
                   <a:noFill/>
                 </a:ln>
                 <a:solidFill>
-                  <a:schemeClr val="tx1"/>
+                  <a:srgbClr val="00B050"/>
                 </a:solidFill>
                 <a:effectLst/>
                 <a:latin typeface="Arial" panose="020B0604020202020204" pitchFamily="34" charset="0"/>
               </a:rPr>
-              <a:t>.</a:t>
-            </a:r>
-          </a:p>
-        </p:txBody>
-      </p:sp>
+              <a:t>qtyD</a:t>
+            </a:r>
+            <a:r>
+              <a:rPr lang="az-Latn-AZ" altLang="en-US" sz="1100" b="1">
+                <a:solidFill>
+                  <a:srgbClr val="00B050"/>
+                </a:solidFill>
+                <a:latin typeface="Arial" panose="020B0604020202020204" pitchFamily="34" charset="0"/>
+              </a:rPr>
+              <a:t>ecrement() </a:t>
+            </a:r>
+            <a:r>
+              <a:rPr lang="az-Latn-AZ" altLang="en-US" sz="1100">
+                <a:latin typeface="Arial" panose="020B0604020202020204" pitchFamily="34" charset="0"/>
+              </a:rPr>
+              <a:t>funksiyasına bir sətr kod daha əlavə edəcəyik növbəti slaydda, çünki 1 məhsul qaldıqdan sonra minus ikonuna basdıqda həmin məhsul tamam yoxa çıxır səbətdən.</a:t>
+            </a:r>
+            <a:endParaRPr kumimoji="0" lang="en-US" altLang="en-US" sz="1100" b="0" i="0" u="none" strike="noStrike" cap="none" normalizeH="0" baseline="0">
+              <a:ln>
+                <a:noFill/>
+              </a:ln>
+              <a:solidFill>
+                <a:schemeClr val="tx1"/>
+              </a:solidFill>
+              <a:effectLst/>
+              <a:latin typeface="Arial" panose="020B0604020202020204" pitchFamily="34" charset="0"/>
+            </a:endParaRPr>
+          </a:p>
+        </p:txBody>
+      </p:sp>
+      <p:pic>
+        <p:nvPicPr>
+          <p:cNvPr id="4" name="Picture 3">
+            <a:extLst>
+              <a:ext uri="{FF2B5EF4-FFF2-40B4-BE49-F238E27FC236}">
+                <a16:creationId xmlns:a16="http://schemas.microsoft.com/office/drawing/2014/main" id="{9122776E-94B5-C99E-EA48-D159F5375F0D}"/>
+              </a:ext>
+            </a:extLst>
+          </p:cNvPr>
+          <p:cNvPicPr>
+            <a:picLocks noChangeAspect="1"/>
+          </p:cNvPicPr>
+          <p:nvPr/>
+        </p:nvPicPr>
+        <p:blipFill>
+          <a:blip r:embed="rId2"/>
+          <a:stretch>
+            <a:fillRect/>
+          </a:stretch>
+        </p:blipFill>
+        <p:spPr>
+          <a:xfrm>
+            <a:off x="2379306" y="1828667"/>
+            <a:ext cx="9812694" cy="5029333"/>
+          </a:xfrm>
+          <a:prstGeom prst="rect">
+            <a:avLst/>
+          </a:prstGeom>
+        </p:spPr>
+      </p:pic>
     </p:spTree>
     <p:extLst>
       <p:ext uri="{BB962C8B-B14F-4D97-AF65-F5344CB8AC3E}">
@@ -3484,6 +4078,364 @@
 </file>
 
 <file path=ppt/slides/slide3.xml><?xml version="1.0" encoding="utf-8"?>
+<p:sld xmlns:a="http://schemas.openxmlformats.org/drawingml/2006/main" xmlns:r="http://schemas.openxmlformats.org/officeDocument/2006/relationships" xmlns:p="http://schemas.openxmlformats.org/presentationml/2006/main">
+  <p:cSld>
+    <p:spTree>
+      <p:nvGrpSpPr>
+        <p:cNvPr id="1" name="">
+          <a:extLst>
+            <a:ext uri="{FF2B5EF4-FFF2-40B4-BE49-F238E27FC236}">
+              <a16:creationId xmlns:a16="http://schemas.microsoft.com/office/drawing/2014/main" id="{17EB83DA-F9FB-9A6B-9142-6C16EB1AE09D}"/>
+            </a:ext>
+          </a:extLst>
+        </p:cNvPr>
+        <p:cNvGrpSpPr/>
+        <p:nvPr/>
+      </p:nvGrpSpPr>
+      <p:grpSpPr>
+        <a:xfrm>
+          <a:off x="0" y="0"/>
+          <a:ext cx="0" cy="0"/>
+          <a:chOff x="0" y="0"/>
+          <a:chExt cx="0" cy="0"/>
+        </a:xfrm>
+      </p:grpSpPr>
+      <p:sp>
+        <p:nvSpPr>
+          <p:cNvPr id="3" name="TextBox 2">
+            <a:extLst>
+              <a:ext uri="{FF2B5EF4-FFF2-40B4-BE49-F238E27FC236}">
+                <a16:creationId xmlns:a16="http://schemas.microsoft.com/office/drawing/2014/main" id="{F8537940-3291-FDA8-6FD3-A18AA926E1D8}"/>
+              </a:ext>
+            </a:extLst>
+          </p:cNvPr>
+          <p:cNvSpPr txBox="1"/>
+          <p:nvPr/>
+        </p:nvSpPr>
+        <p:spPr>
+          <a:xfrm>
+            <a:off x="217714" y="255046"/>
+            <a:ext cx="11756571" cy="355354"/>
+          </a:xfrm>
+          <a:prstGeom prst="rect">
+            <a:avLst/>
+          </a:prstGeom>
+          <a:noFill/>
+        </p:spPr>
+        <p:txBody>
+          <a:bodyPr wrap="square">
+            <a:spAutoFit/>
+          </a:bodyPr>
+          <a:lstStyle/>
+          <a:p>
+            <a:pPr>
+              <a:lnSpc>
+                <a:spcPct val="150000"/>
+              </a:lnSpc>
+              <a:buNone/>
+            </a:pPr>
+            <a:r>
+              <a:rPr lang="az-Latn-AZ" altLang="en-US" sz="1300">
+                <a:latin typeface="Arial" panose="020B0604020202020204" pitchFamily="34" charset="0"/>
+              </a:rPr>
+              <a:t>Nəticə....</a:t>
+            </a:r>
+            <a:endParaRPr kumimoji="0" lang="en-US" altLang="en-US" sz="1300" b="0" i="0" u="none" strike="noStrike" cap="none" normalizeH="0" baseline="0">
+              <a:ln>
+                <a:noFill/>
+              </a:ln>
+              <a:solidFill>
+                <a:schemeClr val="tx1"/>
+              </a:solidFill>
+              <a:effectLst/>
+              <a:latin typeface="Arial" panose="020B0604020202020204" pitchFamily="34" charset="0"/>
+            </a:endParaRPr>
+          </a:p>
+        </p:txBody>
+      </p:sp>
+      <p:pic>
+        <p:nvPicPr>
+          <p:cNvPr id="4" name="Picture 3">
+            <a:extLst>
+              <a:ext uri="{FF2B5EF4-FFF2-40B4-BE49-F238E27FC236}">
+                <a16:creationId xmlns:a16="http://schemas.microsoft.com/office/drawing/2014/main" id="{97FEFA75-B96B-41AC-9F55-6354A26D3DCC}"/>
+              </a:ext>
+            </a:extLst>
+          </p:cNvPr>
+          <p:cNvPicPr>
+            <a:picLocks noChangeAspect="1"/>
+          </p:cNvPicPr>
+          <p:nvPr/>
+        </p:nvPicPr>
+        <p:blipFill>
+          <a:blip r:embed="rId2"/>
+          <a:stretch>
+            <a:fillRect/>
+          </a:stretch>
+        </p:blipFill>
+        <p:spPr>
+          <a:xfrm>
+            <a:off x="0" y="811748"/>
+            <a:ext cx="12192000" cy="6046252"/>
+          </a:xfrm>
+          <a:prstGeom prst="rect">
+            <a:avLst/>
+          </a:prstGeom>
+          <a:ln w="38100" cap="sq">
+            <a:solidFill>
+              <a:srgbClr val="000000"/>
+            </a:solidFill>
+            <a:prstDash val="solid"/>
+            <a:miter lim="800000"/>
+          </a:ln>
+          <a:effectLst>
+            <a:outerShdw blurRad="50800" dist="38100" dir="2700000" algn="tl" rotWithShape="0">
+              <a:srgbClr val="000000">
+                <a:alpha val="43000"/>
+              </a:srgbClr>
+            </a:outerShdw>
+          </a:effectLst>
+        </p:spPr>
+      </p:pic>
+    </p:spTree>
+    <p:extLst>
+      <p:ext uri="{BB962C8B-B14F-4D97-AF65-F5344CB8AC3E}">
+        <p14:creationId xmlns:p14="http://schemas.microsoft.com/office/powerpoint/2010/main" val="907928952"/>
+      </p:ext>
+    </p:extLst>
+  </p:cSld>
+  <p:clrMapOvr>
+    <a:masterClrMapping/>
+  </p:clrMapOvr>
+</p:sld>
+</file>
+
+<file path=ppt/slides/slide4.xml><?xml version="1.0" encoding="utf-8"?>
+<p:sld xmlns:a="http://schemas.openxmlformats.org/drawingml/2006/main" xmlns:r="http://schemas.openxmlformats.org/officeDocument/2006/relationships" xmlns:p="http://schemas.openxmlformats.org/presentationml/2006/main">
+  <p:cSld>
+    <p:spTree>
+      <p:nvGrpSpPr>
+        <p:cNvPr id="1" name="">
+          <a:extLst>
+            <a:ext uri="{FF2B5EF4-FFF2-40B4-BE49-F238E27FC236}">
+              <a16:creationId xmlns:a16="http://schemas.microsoft.com/office/drawing/2014/main" id="{3E5252A7-2091-06EF-57DF-5766D4B40442}"/>
+            </a:ext>
+          </a:extLst>
+        </p:cNvPr>
+        <p:cNvGrpSpPr/>
+        <p:nvPr/>
+      </p:nvGrpSpPr>
+      <p:grpSpPr>
+        <a:xfrm>
+          <a:off x="0" y="0"/>
+          <a:ext cx="0" cy="0"/>
+          <a:chOff x="0" y="0"/>
+          <a:chExt cx="0" cy="0"/>
+        </a:xfrm>
+      </p:grpSpPr>
+      <p:sp>
+        <p:nvSpPr>
+          <p:cNvPr id="3" name="TextBox 2">
+            <a:extLst>
+              <a:ext uri="{FF2B5EF4-FFF2-40B4-BE49-F238E27FC236}">
+                <a16:creationId xmlns:a16="http://schemas.microsoft.com/office/drawing/2014/main" id="{CA1F602A-257C-321C-162C-F6103CB12FB8}"/>
+              </a:ext>
+            </a:extLst>
+          </p:cNvPr>
+          <p:cNvSpPr txBox="1"/>
+          <p:nvPr/>
+        </p:nvSpPr>
+        <p:spPr>
+          <a:xfrm>
+            <a:off x="217715" y="255046"/>
+            <a:ext cx="6490996" cy="355354"/>
+          </a:xfrm>
+          <a:prstGeom prst="rect">
+            <a:avLst/>
+          </a:prstGeom>
+          <a:noFill/>
+        </p:spPr>
+        <p:txBody>
+          <a:bodyPr wrap="square">
+            <a:spAutoFit/>
+          </a:bodyPr>
+          <a:lstStyle/>
+          <a:p>
+            <a:pPr>
+              <a:lnSpc>
+                <a:spcPct val="150000"/>
+              </a:lnSpc>
+              <a:buNone/>
+            </a:pPr>
+            <a:r>
+              <a:rPr kumimoji="0" lang="az-Latn-AZ" altLang="en-US" sz="1300" b="1" i="0" u="none" strike="noStrike" cap="none" normalizeH="0" baseline="0">
+                <a:ln>
+                  <a:noFill/>
+                </a:ln>
+                <a:solidFill>
+                  <a:schemeClr val="tx1"/>
+                </a:solidFill>
+                <a:effectLst/>
+                <a:latin typeface="Arial" panose="020B0604020202020204" pitchFamily="34" charset="0"/>
+              </a:rPr>
+              <a:t>İF</a:t>
+            </a:r>
+            <a:r>
+              <a:rPr kumimoji="0" lang="az-Latn-AZ" altLang="en-US" sz="1300" b="0" i="0" u="none" strike="noStrike" cap="none" normalizeH="0" baseline="0">
+                <a:ln>
+                  <a:noFill/>
+                </a:ln>
+                <a:solidFill>
+                  <a:schemeClr val="tx1"/>
+                </a:solidFill>
+                <a:effectLst/>
+                <a:latin typeface="Arial" panose="020B0604020202020204" pitchFamily="34" charset="0"/>
+              </a:rPr>
+              <a:t> ilə şərt qoşaraq deyirik ki, əgər səbətdə 1 dənədən çox məhsul varsa onu azalt.</a:t>
+            </a:r>
+            <a:endParaRPr kumimoji="0" lang="en-US" altLang="en-US" sz="1300" b="0" i="0" u="none" strike="noStrike" cap="none" normalizeH="0" baseline="0">
+              <a:ln>
+                <a:noFill/>
+              </a:ln>
+              <a:solidFill>
+                <a:schemeClr val="tx1"/>
+              </a:solidFill>
+              <a:effectLst/>
+              <a:latin typeface="Arial" panose="020B0604020202020204" pitchFamily="34" charset="0"/>
+            </a:endParaRPr>
+          </a:p>
+        </p:txBody>
+      </p:sp>
+      <p:pic>
+        <p:nvPicPr>
+          <p:cNvPr id="4" name="Picture 3">
+            <a:extLst>
+              <a:ext uri="{FF2B5EF4-FFF2-40B4-BE49-F238E27FC236}">
+                <a16:creationId xmlns:a16="http://schemas.microsoft.com/office/drawing/2014/main" id="{9FDDE133-95EA-D604-D852-A638C41B4D9B}"/>
+              </a:ext>
+            </a:extLst>
+          </p:cNvPr>
+          <p:cNvPicPr>
+            <a:picLocks noChangeAspect="1"/>
+          </p:cNvPicPr>
+          <p:nvPr/>
+        </p:nvPicPr>
+        <p:blipFill>
+          <a:blip r:embed="rId2"/>
+          <a:stretch>
+            <a:fillRect/>
+          </a:stretch>
+        </p:blipFill>
+        <p:spPr>
+          <a:xfrm>
+            <a:off x="6895361" y="0"/>
+            <a:ext cx="5296639" cy="3458058"/>
+          </a:xfrm>
+          <a:prstGeom prst="rect">
+            <a:avLst/>
+          </a:prstGeom>
+        </p:spPr>
+      </p:pic>
+    </p:spTree>
+    <p:extLst>
+      <p:ext uri="{BB962C8B-B14F-4D97-AF65-F5344CB8AC3E}">
+        <p14:creationId xmlns:p14="http://schemas.microsoft.com/office/powerpoint/2010/main" val="3654893631"/>
+      </p:ext>
+    </p:extLst>
+  </p:cSld>
+  <p:clrMapOvr>
+    <a:masterClrMapping/>
+  </p:clrMapOvr>
+</p:sld>
+</file>
+
+<file path=ppt/slides/slide5.xml><?xml version="1.0" encoding="utf-8"?>
+<p:sld xmlns:a="http://schemas.openxmlformats.org/drawingml/2006/main" xmlns:r="http://schemas.openxmlformats.org/officeDocument/2006/relationships" xmlns:p="http://schemas.openxmlformats.org/presentationml/2006/main">
+  <p:cSld>
+    <p:spTree>
+      <p:nvGrpSpPr>
+        <p:cNvPr id="1" name="">
+          <a:extLst>
+            <a:ext uri="{FF2B5EF4-FFF2-40B4-BE49-F238E27FC236}">
+              <a16:creationId xmlns:a16="http://schemas.microsoft.com/office/drawing/2014/main" id="{0E687DD2-2DDD-4A57-A7ED-67DD8B1EE48D}"/>
+            </a:ext>
+          </a:extLst>
+        </p:cNvPr>
+        <p:cNvGrpSpPr/>
+        <p:nvPr/>
+      </p:nvGrpSpPr>
+      <p:grpSpPr>
+        <a:xfrm>
+          <a:off x="0" y="0"/>
+          <a:ext cx="0" cy="0"/>
+          <a:chOff x="0" y="0"/>
+          <a:chExt cx="0" cy="0"/>
+        </a:xfrm>
+      </p:grpSpPr>
+      <p:sp>
+        <p:nvSpPr>
+          <p:cNvPr id="3" name="TextBox 2">
+            <a:extLst>
+              <a:ext uri="{FF2B5EF4-FFF2-40B4-BE49-F238E27FC236}">
+                <a16:creationId xmlns:a16="http://schemas.microsoft.com/office/drawing/2014/main" id="{2AB67681-3CB6-8A15-301E-4762641EAF20}"/>
+              </a:ext>
+            </a:extLst>
+          </p:cNvPr>
+          <p:cNvSpPr txBox="1"/>
+          <p:nvPr/>
+        </p:nvSpPr>
+        <p:spPr>
+          <a:xfrm>
+            <a:off x="217714" y="255046"/>
+            <a:ext cx="11756571" cy="355354"/>
+          </a:xfrm>
+          <a:prstGeom prst="rect">
+            <a:avLst/>
+          </a:prstGeom>
+          <a:noFill/>
+        </p:spPr>
+        <p:txBody>
+          <a:bodyPr wrap="square">
+            <a:spAutoFit/>
+          </a:bodyPr>
+          <a:lstStyle/>
+          <a:p>
+            <a:pPr>
+              <a:lnSpc>
+                <a:spcPct val="150000"/>
+              </a:lnSpc>
+              <a:buNone/>
+            </a:pPr>
+            <a:r>
+              <a:rPr kumimoji="0" lang="en-US" altLang="en-US" sz="1300" b="0" i="0" u="none" strike="noStrike" cap="none" normalizeH="0" baseline="0">
+                <a:ln>
+                  <a:noFill/>
+                </a:ln>
+                <a:solidFill>
+                  <a:schemeClr val="tx1"/>
+                </a:solidFill>
+                <a:effectLst/>
+                <a:latin typeface="Arial" panose="020B0604020202020204" pitchFamily="34" charset="0"/>
+              </a:rPr>
+              <a:t>.</a:t>
+            </a:r>
+          </a:p>
+        </p:txBody>
+      </p:sp>
+    </p:spTree>
+    <p:extLst>
+      <p:ext uri="{BB962C8B-B14F-4D97-AF65-F5344CB8AC3E}">
+        <p14:creationId xmlns:p14="http://schemas.microsoft.com/office/powerpoint/2010/main" val="829230366"/>
+      </p:ext>
+    </p:extLst>
+  </p:cSld>
+  <p:clrMapOvr>
+    <a:masterClrMapping/>
+  </p:clrMapOvr>
+</p:sld>
+</file>
+
+<file path=ppt/slides/slide6.xml><?xml version="1.0" encoding="utf-8"?>
 <p:sld xmlns:a="http://schemas.openxmlformats.org/drawingml/2006/main" xmlns:r="http://schemas.openxmlformats.org/officeDocument/2006/relationships" xmlns:p="http://schemas.openxmlformats.org/presentationml/2006/main">
   <p:cSld>
     <p:spTree>
